--- a/templates/t5_gakkyu_biraki.pptx
+++ b/templates/t5_gakkyu_biraki.pptx
@@ -3976,7 +3976,7 @@
                 </a:solidFill>
                 <a:latin typeface="BIZ UDPゴシック"/>
               </a:rPr>
-              <a:t>2学期、はじめます。</a:t>
+              <a:t>2学期 はじめます</a:t>
             </a:r>
           </a:p>
         </p:txBody>
@@ -4108,7 +4108,7 @@
                 </a:solidFill>
                 <a:latin typeface="BIZ UDPゴシック"/>
               </a:rPr>
-              <a:t>（学校・行事・空 なんでも。</a:t>
+              <a:t>（学校・行事・空 なんでも</a:t>
             </a:r>
           </a:p>
           <a:p>
@@ -4175,7 +4175,7 @@
                 </a:solidFill>
                 <a:latin typeface="BIZ UDPゴシック"/>
               </a:rPr>
-              <a:t>なさい。</a:t>
+              <a:t>なさい</a:t>
             </a:r>
           </a:p>
         </p:txBody>
@@ -4240,7 +4240,7 @@
                 </a:solidFill>
                 <a:latin typeface="BIZ UDPゴシック"/>
               </a:rPr>
-              <a:t>先生が 2学期、</a:t>
+              <a:t>先生が 2学期</a:t>
             </a:r>
           </a:p>
           <a:p>
@@ -4256,7 +4256,7 @@
                 </a:solidFill>
                 <a:latin typeface="BIZ UDPゴシック"/>
               </a:rPr>
-              <a:t>いちばん 大切に したいこと。</a:t>
+              <a:t>いちばん 大切に したいこと</a:t>
             </a:r>
           </a:p>
         </p:txBody>
@@ -4416,7 +4416,7 @@
                 </a:solidFill>
                 <a:latin typeface="BIZ UDPゴシック"/>
               </a:rPr>
-              <a:t>言える教室。</a:t>
+              <a:t>言える教室</a:t>
             </a:r>
           </a:p>
         </p:txBody>
@@ -4525,7 +4525,7 @@
                 </a:solidFill>
                 <a:latin typeface="BIZ UDPゴシック"/>
               </a:rPr>
-              <a:t>まちがいは、みんなの べんきょうに なるから。</a:t>
+              <a:t>まちがいは みんなの べんきょうに なるから</a:t>
             </a:r>
           </a:p>
         </p:txBody>
@@ -4694,7 +4694,7 @@
                 </a:solidFill>
                 <a:latin typeface="BIZ UDPゴシック"/>
               </a:rPr>
-              <a:t>2学期も、よろしく。</a:t>
+              <a:t>2学期も よろしく</a:t>
             </a:r>
           </a:p>
         </p:txBody>
